--- a/docs/경쟁기술_인텔리전스_구조_V3.pptx
+++ b/docs/경쟁기술_인텔리전스_구조_V3.pptx
@@ -3205,7 +3205,7 @@
                 </a:solidFill>
                 <a:latin typeface="맑은 고딕"/>
               </a:rPr>
-              <a:t>경쟁사의 특허·설비투자·발표를 매일 모아, 우리에게 없는 기술을 근거와 함께 드러내는 체계   |   2026-09-12 실측</a:t>
+              <a:t>경쟁사의 특허·설비투자를 모아, 우리에게 없는 기술을 근거와 함께 드러내는 체계   |   모든 숫자는 2026-09-12 실제 호출로 측정   |   근거 1건마다 원문 링크로 되짚을 수 있음</a:t>
             </a:r>
           </a:p>
         </p:txBody>
@@ -3748,7 +3748,7 @@
                 </a:solidFill>
                 <a:latin typeface="맑은 고딕"/>
               </a:rPr>
-              <a:t>③ 지금 끌어온 것</a:t>
+              <a:t>③ 실제로 퍼온 것</a:t>
             </a:r>
           </a:p>
         </p:txBody>
@@ -3783,11 +3783,11 @@
             <a:r>
               <a:rPr sz="1900" b="1">
                 <a:solidFill>
-                  <a:srgbClr val="E5007D"/>
+                  <a:srgbClr val="2C6B52"/>
                 </a:solidFill>
                 <a:latin typeface="맑은 고딕"/>
               </a:rPr>
-              <a:t>127 건</a:t>
+              <a:t>41,685 건</a:t>
             </a:r>
           </a:p>
         </p:txBody>
@@ -3826,7 +3826,7 @@
                 </a:solidFill>
                 <a:latin typeface="맑은 고딕"/>
               </a:rPr>
-              <a:t>연결은 됐으나 아직 안 쌓음</a:t>
+              <a:t>경쟁사 특허 4만 + 국내 1,665 + 공시 20</a:t>
             </a:r>
           </a:p>
         </p:txBody>
@@ -3955,7 +3955,7 @@
                 </a:solidFill>
                 <a:latin typeface="맑은 고딕"/>
               </a:rPr>
-              <a:t>④ 화면에 뜬 것</a:t>
+              <a:t>④ 기술에 확실히 붙은 것</a:t>
             </a:r>
           </a:p>
         </p:txBody>
@@ -3990,11 +3990,11 @@
             <a:r>
               <a:rPr sz="1900" b="1">
                 <a:solidFill>
-                  <a:srgbClr val="E5007D"/>
+                  <a:srgbClr val="B9821A"/>
                 </a:solidFill>
                 <a:latin typeface="맑은 고딕"/>
               </a:rPr>
-              <a:t>61 건</a:t>
+              <a:t>228 건</a:t>
             </a:r>
           </a:p>
         </p:txBody>
@@ -4033,7 +4033,7 @@
                 </a:solidFill>
                 <a:latin typeface="맑은 고딕"/>
               </a:rPr>
-              <a:t>아직 샘플 데이터</a:t>
+              <a:t>나머지는 '관련 가능성'으로만 분류</a:t>
             </a:r>
           </a:p>
         </p:txBody>
@@ -4197,11 +4197,11 @@
             <a:r>
               <a:rPr sz="1900" b="1">
                 <a:solidFill>
-                  <a:srgbClr val="E5007D"/>
+                  <a:srgbClr val="B9821A"/>
                 </a:solidFill>
                 <a:latin typeface="맑은 고딕"/>
               </a:rPr>
-              <a:t>약 40 %</a:t>
+              <a:t>약 55 %</a:t>
             </a:r>
           </a:p>
         </p:txBody>
@@ -4240,7 +4240,7 @@
                 </a:solidFill>
                 <a:latin typeface="맑은 고딕"/>
               </a:rPr>
-              <a:t>뼈대 완성, 적재·연결 남음</a:t>
+              <a:t>수집은 됐고, 기술 분류가 남음</a:t>
             </a:r>
           </a:p>
         </p:txBody>
@@ -4325,7 +4325,7 @@
                 </a:solidFill>
                 <a:latin typeface="맑은 고딕"/>
               </a:rPr>
-              <a:t>정보를 어디서 가져오는가 — 8개 창구 중 4개 연결</a:t>
+              <a:t>정보를 어디서 가져오는가 — 8개 창구 중 4개 연결, 4만 건 확보</a:t>
             </a:r>
           </a:p>
         </p:txBody>
@@ -4447,7 +4447,7 @@
                 </a:solidFill>
                 <a:latin typeface="맑은 고딕"/>
               </a:rPr>
-              <a:t>전 세계 특허 — 미국·중국·일본·한국·유럽</a:t>
+              <a:t>경쟁사 특허를 직접 퍼옴 (전 세계)</a:t>
             </a:r>
           </a:p>
         </p:txBody>
@@ -4486,7 +4486,7 @@
                 </a:solidFill>
                 <a:latin typeface="맑은 고딕"/>
               </a:rPr>
-              <a:t>1억 7,041만</a:t>
+              <a:t>40,000</a:t>
             </a:r>
           </a:p>
         </p:txBody>
@@ -4544,7 +4544,7 @@
         <p:spPr>
           <a:xfrm>
             <a:off x="4956048" y="2761488"/>
-            <a:ext cx="230428" cy="77724"/>
+            <a:ext cx="460857" cy="77724"/>
           </a:xfrm>
           <a:prstGeom prst="rect">
             <a:avLst/>
@@ -4613,7 +4613,7 @@
                 </a:solidFill>
                 <a:latin typeface="맑은 고딕"/>
               </a:rPr>
-              <a:t>35%</a:t>
+              <a:t>70%</a:t>
             </a:r>
           </a:p>
         </p:txBody>
@@ -4735,7 +4735,7 @@
                 </a:solidFill>
                 <a:latin typeface="맑은 고딕"/>
               </a:rPr>
-              <a:t>한국 특허청 — 국내 특허</a:t>
+              <a:t>한국 특허청 — 57개 기술명으로 검색</a:t>
             </a:r>
           </a:p>
         </p:txBody>
@@ -4774,7 +4774,7 @@
                 </a:solidFill>
                 <a:latin typeface="맑은 고딕"/>
               </a:rPr>
-              <a:t>8만 8,306</a:t>
+              <a:t>1,665</a:t>
             </a:r>
           </a:p>
         </p:txBody>
@@ -4832,7 +4832,7 @@
         <p:spPr>
           <a:xfrm>
             <a:off x="4956048" y="3058668"/>
-            <a:ext cx="263347" cy="77724"/>
+            <a:ext cx="427939" cy="77724"/>
           </a:xfrm>
           <a:prstGeom prst="rect">
             <a:avLst/>
@@ -4901,7 +4901,7 @@
                 </a:solidFill>
                 <a:latin typeface="맑은 고딕"/>
               </a:rPr>
-              <a:t>40%</a:t>
+              <a:t>65%</a:t>
             </a:r>
           </a:p>
         </p:txBody>
@@ -5023,7 +5023,7 @@
                 </a:solidFill>
                 <a:latin typeface="맑은 고딕"/>
               </a:rPr>
-              <a:t>중국 공시 — CATL·BYD 설비투자</a:t>
+              <a:t>중국 공시 — CATL 설비투자</a:t>
             </a:r>
           </a:p>
         </p:txBody>
@@ -5062,7 +5062,7 @@
                 </a:solidFill>
                 <a:latin typeface="맑은 고딕"/>
               </a:rPr>
-              <a:t>6</a:t>
+              <a:t>17</a:t>
             </a:r>
           </a:p>
         </p:txBody>
@@ -5120,7 +5120,7 @@
         <p:spPr>
           <a:xfrm>
             <a:off x="4956048" y="3355848"/>
-            <a:ext cx="197510" cy="77724"/>
+            <a:ext cx="230428" cy="77724"/>
           </a:xfrm>
           <a:prstGeom prst="rect">
             <a:avLst/>
@@ -5189,7 +5189,7 @@
                 </a:solidFill>
                 <a:latin typeface="맑은 고딕"/>
               </a:rPr>
-              <a:t>30%</a:t>
+              <a:t>35%</a:t>
             </a:r>
           </a:p>
         </p:txBody>
@@ -5311,7 +5311,7 @@
                 </a:solidFill>
                 <a:latin typeface="맑은 고딕"/>
               </a:rPr>
-              <a:t>한국 공시 — 삼성SDI·SK온 설비투자</a:t>
+              <a:t>한국 공시 — 경쟁사는 0건 (원천에 없음)</a:t>
             </a:r>
           </a:p>
         </p:txBody>
@@ -5350,7 +5350,7 @@
                 </a:solidFill>
                 <a:latin typeface="맑은 고딕"/>
               </a:rPr>
-              <a:t>2</a:t>
+              <a:t>3</a:t>
             </a:r>
           </a:p>
         </p:txBody>
@@ -5497,7 +5497,7 @@
             <a:avLst/>
           </a:prstGeom>
           <a:solidFill>
-            <a:srgbClr val="E5007D"/>
+            <a:srgbClr val="B6BDC3"/>
           </a:solidFill>
           <a:ln>
             <a:noFill/>
@@ -5741,7 +5741,7 @@
             <a:avLst/>
           </a:prstGeom>
           <a:solidFill>
-            <a:srgbClr val="E5007D"/>
+            <a:srgbClr val="B6BDC3"/>
           </a:solidFill>
           <a:ln>
             <a:noFill/>
@@ -5985,7 +5985,7 @@
             <a:avLst/>
           </a:prstGeom>
           <a:solidFill>
-            <a:srgbClr val="E5007D"/>
+            <a:srgbClr val="B6BDC3"/>
           </a:solidFill>
           <a:ln>
             <a:noFill/>
@@ -6229,7 +6229,7 @@
             <a:avLst/>
           </a:prstGeom>
           <a:solidFill>
-            <a:srgbClr val="E5007D"/>
+            <a:srgbClr val="B6BDC3"/>
           </a:solidFill>
           <a:ln>
             <a:noFill/>
@@ -6616,7 +6616,7 @@
                 </a:solidFill>
                 <a:latin typeface="맑은 고딕"/>
               </a:rPr>
-              <a:t>· 각 항목마다 근거 원문 링크가 붙어 있어 되짚어 확인할 수 있다</a:t>
+              <a:t>· 숫자를 누르면 근거가 된 특허 목록과 원문 링크가 바로 뜬다</a:t>
             </a:r>
           </a:p>
         </p:txBody>
@@ -6655,7 +6655,7 @@
                 </a:solidFill>
                 <a:latin typeface="맑은 고딕"/>
               </a:rPr>
-              <a:t>· 얼마나 뒤졌는지를 연 단위로 제시해 투자 시급성을 가른다</a:t>
+              <a:t>· TRL·시간격차·시급도 모두 산정 근거를 화면에서 확인할 수 있다</a:t>
             </a:r>
           </a:p>
         </p:txBody>
@@ -6694,7 +6694,7 @@
                 </a:solidFill>
                 <a:latin typeface="맑은 고딕"/>
               </a:rPr>
-              <a:t>· 추측과 확인을 4단계로 구분해 표시한다 — 확정과 추정을 섞지 않는다</a:t>
+              <a:t>· 확실한 근거와 '관련 가능성'을 분리한다 — 숫자를 부풀리지 않는다</a:t>
             </a:r>
           </a:p>
         </p:txBody>
@@ -6818,7 +6818,7 @@
                 </a:solidFill>
                 <a:latin typeface="맑은 고딕"/>
               </a:rPr>
-              <a:t>· 화면의 61건은 아직 샘플이다. 실제 데이터와 아직 연결되지 않았다</a:t>
+              <a:t>· 특허 4만 건 중 특정 기술에 확실히 붙은 것은 228건뿐이다 (용어 매칭의 한계)</a:t>
             </a:r>
           </a:p>
         </p:txBody>
@@ -6857,7 +6857,7 @@
                 </a:solidFill>
                 <a:latin typeface="맑은 고딕"/>
               </a:rPr>
-              <a:t>· 같은 발명이 나라별로 4건처럼 세어진다 — 특허가족 병합이 없다</a:t>
+              <a:t>· 기존에 '미보유'로 적혀 있던 16개 기술 모두에서 자사 특허가 검색되었다</a:t>
             </a:r>
           </a:p>
         </p:txBody>
@@ -6896,7 +6896,7 @@
                 </a:solidFill>
                 <a:latin typeface="맑은 고딕"/>
               </a:rPr>
-              <a:t>· 한 회사가 법인명 10개로 흩어져 있다 (CATL만 5개, 파나소닉 10개+)</a:t>
+              <a:t>· 같은 발명이 나라별로 여러 건처럼 세어진다 — 특허가족 병합이 없다</a:t>
             </a:r>
           </a:p>
         </p:txBody>
@@ -6935,7 +6935,7 @@
                 </a:solidFill>
                 <a:latin typeface="맑은 고딕"/>
               </a:rPr>
-              <a:t>· 중국·한국 경쟁사의 설비투자 공시는 원천 자체가 비어 있다</a:t>
+              <a:t>· 중국·한국 경쟁사의 설비투자 공시는 원천 자체가 비어 있다 (HKEX 로 이동)</a:t>
             </a:r>
           </a:p>
         </p:txBody>
@@ -7064,7 +7064,7 @@
                 </a:solidFill>
                 <a:latin typeface="맑은 고딕"/>
               </a:rPr>
-              <a:t>다음 1단계</a:t>
+              <a:t>완료</a:t>
             </a:r>
           </a:p>
         </p:txBody>
@@ -7103,7 +7103,7 @@
                 </a:solidFill>
                 <a:latin typeface="맑은 고딕"/>
               </a:rPr>
-              <a:t>전체 특허 한 번에 퍼오기</a:t>
+              <a:t>특허 4만 건 퍼오기 · 화면 연결</a:t>
             </a:r>
           </a:p>
         </p:txBody>
@@ -7142,8 +7142,8 @@
                 </a:solidFill>
                 <a:latin typeface="맑은 고딕"/>
               </a:rPr>
-              <a:t>지금은 물어볼 때마다 1억 7천만 건을 훑는다.
-한 번 퍼와 쌓으면 그 뒤론 공짜다.</a:t>
+              <a:t>경쟁사 특허를 통째로 확보했고
+화면이 실데이터를 그린다.</a:t>
             </a:r>
           </a:p>
         </p:txBody>
@@ -7182,7 +7182,7 @@
                 </a:solidFill>
                 <a:latin typeface="맑은 고딕"/>
               </a:rPr>
-              <a:t>1회 약 2,000원</a:t>
+              <a:t>실제 비용 2,000원</a:t>
             </a:r>
           </a:p>
         </p:txBody>
@@ -7248,7 +7248,7 @@
             <a:avLst/>
           </a:prstGeom>
           <a:solidFill>
-            <a:srgbClr val="2C6B52"/>
+            <a:srgbClr val="B9821A"/>
           </a:solidFill>
           <a:ln>
             <a:noFill/>
@@ -7311,7 +7311,7 @@
                 </a:solidFill>
                 <a:latin typeface="맑은 고딕"/>
               </a:rPr>
-              <a:t>다음 2단계</a:t>
+              <a:t>다음 1단계</a:t>
             </a:r>
           </a:p>
         </p:txBody>
@@ -7350,7 +7350,7 @@
                 </a:solidFill>
                 <a:latin typeface="맑은 고딕"/>
               </a:rPr>
-              <a:t>회사명·특허가족 병합</a:t>
+              <a:t>특허를 기술로 분류 (AI 판독)</a:t>
             </a:r>
           </a:p>
         </p:txBody>
@@ -7389,8 +7389,8 @@
                 </a:solidFill>
                 <a:latin typeface="맑은 고딕"/>
               </a:rPr>
-              <a:t>숫자를 믿을 수 있게 만드는 단계.
-이게 없으면 건수가 부풀려진다.</a:t>
+              <a:t>단어가 겹치는지가 아니라 내용을 읽어
+어느 공정기술인지 판별한다.</a:t>
             </a:r>
           </a:p>
         </p:txBody>
@@ -7425,11 +7425,11 @@
             <a:r>
               <a:rPr sz="900" b="1">
                 <a:solidFill>
-                  <a:srgbClr val="2C6B52"/>
+                  <a:srgbClr val="B9821A"/>
                 </a:solidFill>
                 <a:latin typeface="맑은 고딕"/>
               </a:rPr>
-              <a:t>추가 비용 없음</a:t>
+              <a:t>약 5일</a:t>
             </a:r>
           </a:p>
         </p:txBody>
@@ -7495,7 +7495,7 @@
             <a:avLst/>
           </a:prstGeom>
           <a:solidFill>
-            <a:srgbClr val="2C6B52"/>
+            <a:srgbClr val="B9821A"/>
           </a:solidFill>
           <a:ln>
             <a:noFill/>
@@ -7558,7 +7558,7 @@
                 </a:solidFill>
                 <a:latin typeface="맑은 고딕"/>
               </a:rPr>
-              <a:t>다음 3단계</a:t>
+              <a:t>다음 2단계</a:t>
             </a:r>
           </a:p>
         </p:txBody>
@@ -7597,7 +7597,7 @@
                 </a:solidFill>
                 <a:latin typeface="맑은 고딕"/>
               </a:rPr>
-              <a:t>실데이터를 화면에 연결</a:t>
+              <a:t>자사 보유 현황 확정</a:t>
             </a:r>
           </a:p>
         </p:txBody>
@@ -7636,8 +7636,8 @@
                 </a:solidFill>
                 <a:latin typeface="맑은 고딕"/>
               </a:rPr>
-              <a:t>샘플 61건 → 수십만 건 기반 판정으로.
-임원 보고 화면이 실제가 된다.</a:t>
+              <a:t>'미보유' 16건이 실제로 미보유인지
+공정기술팀 확인이 필요하다.</a:t>
             </a:r>
           </a:p>
         </p:txBody>
@@ -7672,11 +7672,11 @@
             <a:r>
               <a:rPr sz="900" b="1">
                 <a:solidFill>
-                  <a:srgbClr val="2C6B52"/>
+                  <a:srgbClr val="B9821A"/>
                 </a:solidFill>
                 <a:latin typeface="맑은 고딕"/>
               </a:rPr>
-              <a:t>추가 비용 없음</a:t>
+              <a:t>약 3일</a:t>
             </a:r>
           </a:p>
         </p:txBody>
@@ -7742,7 +7742,7 @@
             <a:avLst/>
           </a:prstGeom>
           <a:solidFill>
-            <a:srgbClr val="E5007D"/>
+            <a:srgbClr val="B9821A"/>
           </a:solidFill>
           <a:ln>
             <a:noFill/>
@@ -7805,7 +7805,7 @@
                 </a:solidFill>
                 <a:latin typeface="맑은 고딕"/>
               </a:rPr>
-              <a:t>합계</a:t>
+              <a:t>다음 3단계</a:t>
             </a:r>
           </a:p>
         </p:txBody>
@@ -7844,7 +7844,7 @@
                 </a:solidFill>
                 <a:latin typeface="맑은 고딕"/>
               </a:rPr>
-              <a:t>약 12 영업일</a:t>
+              <a:t>회사명·특허가족 병합</a:t>
             </a:r>
           </a:p>
         </p:txBody>
@@ -7883,8 +7883,8 @@
                 </a:solidFill>
                 <a:latin typeface="맑은 고딕"/>
               </a:rPr>
-              <a:t>여기까지 하면 이 화면의 모든 숫자가
-실제 수집 데이터가 된다.</a:t>
+              <a:t>같은 발명이 여러 건으로 세어지는 것을
+막아야 숫자를 믿을 수 있다.</a:t>
             </a:r>
           </a:p>
         </p:txBody>
@@ -7919,11 +7919,11 @@
             <a:r>
               <a:rPr sz="900" b="1">
                 <a:solidFill>
-                  <a:srgbClr val="E5007D"/>
+                  <a:srgbClr val="B9821A"/>
                 </a:solidFill>
                 <a:latin typeface="맑은 고딕"/>
               </a:rPr>
-              <a:t>총 2,000원 수준</a:t>
+              <a:t>약 2일</a:t>
             </a:r>
           </a:p>
         </p:txBody>
